--- a/EXEMPLE POWERPOINT.pptx
+++ b/EXEMPLE POWERPOINT.pptx
@@ -366,7 +366,7 @@
               <a:pPr>
                 <a:defRPr/>
               </a:pPr>
-              <a:t>‹N°›</a:t>
+              <a:t>‹#›</a:t>
             </a:fld>
             <a:endParaRPr lang="fr-CA"/>
           </a:p>
@@ -690,7 +690,7 @@
               <a:pPr>
                 <a:defRPr/>
               </a:pPr>
-              <a:t>‹N°›</a:t>
+              <a:t>‹#›</a:t>
             </a:fld>
             <a:endParaRPr lang="fr-CA"/>
           </a:p>
@@ -3910,7 +3910,7 @@
         </p:nvSpPr>
         <p:spPr>
           <a:xfrm>
-            <a:off x="1899453" y="2276872"/>
+            <a:off x="1763688" y="1916832"/>
             <a:ext cx="5472608" cy="2520280"/>
           </a:xfrm>
         </p:spPr>
@@ -3920,9 +3920,10 @@
           <a:p>
             <a:pPr algn="ctr"/>
             <a:r>
-              <a:rPr lang="fr-FR" sz="4800" dirty="0"/>
-              <a:t>THEME</a:t>
-            </a:r>
+              <a:rPr lang="fr-FR" sz="4800" dirty="0" smtClean="0"/>
+              <a:t>THEME: Génériques et Collections (1)</a:t>
+            </a:r>
+            <a:endParaRPr lang="fr-FR" sz="4800" dirty="0"/>
           </a:p>
         </p:txBody>
       </p:sp>
@@ -4276,6 +4277,42 @@
           <a:chExt cx="0" cy="0"/>
         </a:xfrm>
       </p:grpSpPr>
+      <p:pic>
+        <p:nvPicPr>
+          <p:cNvPr id="2" name="Image 6">
+            <a:extLst>
+              <a:ext uri="{FF2B5EF4-FFF2-40B4-BE49-F238E27FC236}">
+                <a16:creationId xmlns:a16="http://schemas.microsoft.com/office/drawing/2014/main" id="{98BE8AC3-2515-43CB-9089-C1E6D9007D92}"/>
+              </a:ext>
+            </a:extLst>
+          </p:cNvPr>
+          <p:cNvPicPr>
+            <a:picLocks noChangeAspect="1"/>
+          </p:cNvPicPr>
+          <p:nvPr/>
+        </p:nvPicPr>
+        <p:blipFill>
+          <a:blip r:embed="rId2" cstate="print">
+            <a:extLst>
+              <a:ext uri="{28A0092B-C50C-407E-A947-70E740481C1C}">
+                <a14:useLocalDpi xmlns:a14="http://schemas.microsoft.com/office/drawing/2010/main" val="0"/>
+              </a:ext>
+            </a:extLst>
+          </a:blip>
+          <a:stretch>
+            <a:fillRect/>
+          </a:stretch>
+        </p:blipFill>
+        <p:spPr>
+          <a:xfrm>
+            <a:off x="7668344" y="6307338"/>
+            <a:ext cx="1296144" cy="515307"/>
+          </a:xfrm>
+          <a:prstGeom prst="rect">
+            <a:avLst/>
+          </a:prstGeom>
+        </p:spPr>
+      </p:pic>
     </p:spTree>
     <p:extLst>
       <p:ext uri="{BB962C8B-B14F-4D97-AF65-F5344CB8AC3E}">
